--- a/templates/posts/october/01-10-2026-thu-li-boubacar-option-c-soil.pptx
+++ b/templates/posts/october/01-10-2026-thu-li-boubacar-option-c-soil.pptx
@@ -3518,7 +3518,7 @@
       <p:grpSpPr/>
       <p:pic>
         <p:nvPicPr>
-          <p:cNvPr id="2" name="Picture 1" descr="752914137360050300.jpg"/>
+          <p:cNvPr id="2" name="Picture 1" descr="8848833760840009940.jpg"/>
           <p:cNvPicPr>
             <a:picLocks noChangeAspect="1"/>
           </p:cNvPicPr>

--- a/templates/posts/october/01-10-2026-thu-li-boubacar-option-c-soil.pptx
+++ b/templates/posts/october/01-10-2026-thu-li-boubacar-option-c-soil.pptx
@@ -3518,7 +3518,7 @@
       <p:grpSpPr/>
       <p:pic>
         <p:nvPicPr>
-          <p:cNvPr id="2" name="Picture 1" descr="8848833760840009940.jpg"/>
+          <p:cNvPr id="2" name="Picture 1" descr="1340570039566560838.jpg"/>
           <p:cNvPicPr>
             <a:picLocks noChangeAspect="1"/>
           </p:cNvPicPr>

--- a/templates/posts/october/01-10-2026-thu-li-boubacar-option-c-soil.pptx
+++ b/templates/posts/october/01-10-2026-thu-li-boubacar-option-c-soil.pptx
@@ -3518,7 +3518,7 @@
       <p:grpSpPr/>
       <p:pic>
         <p:nvPicPr>
-          <p:cNvPr id="2" name="Picture 1" descr="1340570039566560838.jpg"/>
+          <p:cNvPr id="2" name="Picture 1" descr="9174752386879866338.jpg"/>
           <p:cNvPicPr>
             <a:picLocks noChangeAspect="1"/>
           </p:cNvPicPr>

--- a/templates/posts/october/01-10-2026-thu-li-boubacar-option-c-soil.pptx
+++ b/templates/posts/october/01-10-2026-thu-li-boubacar-option-c-soil.pptx
@@ -3518,7 +3518,7 @@
       <p:grpSpPr/>
       <p:pic>
         <p:nvPicPr>
-          <p:cNvPr id="2" name="Picture 1" descr="9174752386879866338.jpg"/>
+          <p:cNvPr id="2" name="Picture 1" descr="1722809077543907914.jpg"/>
           <p:cNvPicPr>
             <a:picLocks noChangeAspect="1"/>
           </p:cNvPicPr>

--- a/templates/posts/october/01-10-2026-thu-li-boubacar-option-c-soil.pptx
+++ b/templates/posts/october/01-10-2026-thu-li-boubacar-option-c-soil.pptx
@@ -3518,7 +3518,7 @@
       <p:grpSpPr/>
       <p:pic>
         <p:nvPicPr>
-          <p:cNvPr id="2" name="Picture 1" descr="1722809077543907914.jpg"/>
+          <p:cNvPr id="2" name="Picture 1" descr="2274888132609175246.jpg"/>
           <p:cNvPicPr>
             <a:picLocks noChangeAspect="1"/>
           </p:cNvPicPr>

--- a/templates/posts/october/01-10-2026-thu-li-boubacar-option-c-soil.pptx
+++ b/templates/posts/october/01-10-2026-thu-li-boubacar-option-c-soil.pptx
@@ -3518,7 +3518,7 @@
       <p:grpSpPr/>
       <p:pic>
         <p:nvPicPr>
-          <p:cNvPr id="2" name="Picture 1" descr="2274888132609175246.jpg"/>
+          <p:cNvPr id="2" name="Picture 1" descr="5388428963069516718.jpg"/>
           <p:cNvPicPr>
             <a:picLocks noChangeAspect="1"/>
           </p:cNvPicPr>

--- a/templates/posts/october/01-10-2026-thu-li-boubacar-option-c-soil.pptx
+++ b/templates/posts/october/01-10-2026-thu-li-boubacar-option-c-soil.pptx
@@ -3518,7 +3518,7 @@
       <p:grpSpPr/>
       <p:pic>
         <p:nvPicPr>
-          <p:cNvPr id="2" name="Picture 1" descr="5388428963069516718.jpg"/>
+          <p:cNvPr id="2" name="Picture 1" descr="7230143144633941712.jpg"/>
           <p:cNvPicPr>
             <a:picLocks noChangeAspect="1"/>
           </p:cNvPicPr>
